--- a/DBTUNING/ch23_기간비교_ComparePeriods/ch23_기간비교.pptx
+++ b/DBTUNING/ch23_기간비교_ComparePeriods/ch23_기간비교.pptx
@@ -1377,7 +1377,7 @@
           <a:lstStyle/>
           <a:p>
             <a:r>
-              <a:t>베이스라인은 두 종류다. 고정 베이스라인은 사람이 고른 대표 구간, 즉 한 순간의 사진이며 배포·패치 전후 비교에 쓴다. 이동 윈도우 베이스라인은 최근 N일의 평시 분포를 자동으로 유지한다. 기본으로 SYSTEM_MOVING_WINDOW가 존재하고 크기는 AWR 보존 기간과 같다. 이 분포가 적응형 임계값의 근거가 되어 12장의 메트릭 경보에서 평시 대비 비정상을 자동 판정한다. 적응형 임계값을 제대로 쓰려면 주간·월간 같은 업무 주기가 윈도우 안에 충분히 들어오도록 크기를 잡아야 한다.</a:t>
+              <a:t>베이스라인은 두 종류다. 고정 베이스라인은 사람이 고른 대표 구간, 즉 한 순간의 사진이며 배포·패치 전후 비교에 쓴다. 이동 윈도우 베이스라인은 최근 N일의 평시 분포를 자동으로 유지한다. 기본으로 SYSTEM_MOVING_WINDOW가 존재하고 크기는 AWR 보존 기간과 같다. 이 분포가 적응형 임계값의 근거가 되어 ch28의 메트릭 경보에서 평시 대비 비정상을 자동 판정한다. 적응형 임계값을 제대로 쓰려면 주간·월간 같은 업무 주기가 윈도우 안에 충분히 들어오도록 크기를 잡아야 한다.</a:t>
             </a:r>
           </a:p>
         </p:txBody>
@@ -5287,7 +5287,7 @@
                 </a:solidFill>
                 <a:latin typeface="맑은 고딕"/>
               </a:rPr>
-              <a:t>제11장</a:t>
+              <a:t>제ch23</a:t>
             </a:r>
           </a:p>
         </p:txBody>
@@ -7397,7 +7397,7 @@
                 </a:solidFill>
                 <a:latin typeface="맑은 고딕"/>
               </a:rPr>
-              <a:t>•  트랜잭션당이 늘었다면 그때가 진짜 파싱 문제(18장)</a:t>
+              <a:t>•  트랜잭션당이 늘었다면 그때가 진짜 파싱 문제(ch32)</a:t>
             </a:r>
           </a:p>
         </p:txBody>
@@ -10347,7 +10347,7 @@
                 </a:solidFill>
                 <a:latin typeface="맑은 고딕"/>
               </a:rPr>
-              <a:t>•  이동 윈도우 → 적응형 임계값(12장)</a:t>
+              <a:t>•  이동 윈도우 → 적응형 임계값(ch28)</a:t>
             </a:r>
           </a:p>
         </p:txBody>
@@ -11192,7 +11192,7 @@
                 </a:solidFill>
                 <a:latin typeface="맑은 고딕"/>
               </a:rPr>
-              <a:t>•  적응형 임계값의 근거 → '평시 대비 비정상' 자동 판정(12장)</a:t>
+              <a:t>•  적응형 임계값의 근거 → '평시 대비 비정상' 자동 판정(ch28)</a:t>
             </a:r>
           </a:p>
           <a:p>

--- a/DBTUNING/ch23_기간비교_ComparePeriods/ch23_기간비교.pptx
+++ b/DBTUNING/ch23_기간비교_ComparePeriods/ch23_기간비교.pptx
@@ -5287,7 +5287,7 @@
                 </a:solidFill>
                 <a:latin typeface="맑은 고딕"/>
               </a:rPr>
-              <a:t>제ch23</a:t>
+              <a:t>ch23</a:t>
             </a:r>
           </a:p>
         </p:txBody>

--- a/DBTUNING/ch23_기간비교_ComparePeriods/ch23_기간비교.pptx
+++ b/DBTUNING/ch23_기간비교_ComparePeriods/ch23_기간비교.pptx
@@ -6013,7 +6013,7 @@
                 </a:solidFill>
                 <a:latin typeface="맑은 고딕"/>
               </a:rPr>
-              <a:t>11.4</a:t>
+              <a:t>23.4</a:t>
             </a:r>
           </a:p>
         </p:txBody>
@@ -6720,7 +6720,7 @@
                 </a:solidFill>
                 <a:latin typeface="맑은 고딕"/>
               </a:rPr>
-              <a:t>11.5</a:t>
+              <a:t>23.5</a:t>
             </a:r>
           </a:p>
         </p:txBody>
@@ -7710,7 +7710,7 @@
                 </a:solidFill>
                 <a:latin typeface="맑은 고딕"/>
               </a:rPr>
-              <a:t>11.6</a:t>
+              <a:t>23.6</a:t>
             </a:r>
           </a:p>
         </p:txBody>
@@ -9148,7 +9148,7 @@
                 </a:solidFill>
                 <a:latin typeface="맑은 고딕"/>
               </a:rPr>
-              <a:t>11.7</a:t>
+              <a:t>23.7</a:t>
             </a:r>
           </a:p>
         </p:txBody>
@@ -10202,7 +10202,7 @@
                 </a:solidFill>
                 <a:latin typeface="맑은 고딕"/>
               </a:rPr>
-              <a:t>11.8</a:t>
+              <a:t>23.8</a:t>
             </a:r>
           </a:p>
         </p:txBody>
@@ -10824,7 +10824,7 @@
                 </a:solidFill>
                 <a:latin typeface="맑은 고딕"/>
               </a:rPr>
-              <a:t>11.2 ~ 11.9</a:t>
+              <a:t>23.2 ~ 23.9</a:t>
             </a:r>
           </a:p>
         </p:txBody>
@@ -10863,7 +10863,7 @@
                 </a:solidFill>
                 <a:latin typeface="맑은 고딕"/>
               </a:rPr>
-              <a:t>•  11.2  기간 비교란 무엇인가 — 두 스냅샷이 아니라 두 구간</a:t>
+              <a:t>•  23.2  기간 비교란 무엇인가 — 두 스냅샷이 아니라 두 구간</a:t>
             </a:r>
           </a:p>
           <a:p>
@@ -10879,7 +10879,7 @@
                 </a:solidFill>
                 <a:latin typeface="맑은 고딕"/>
               </a:rPr>
-              <a:t>•  11.3  AWR Compare Periods 보고서 생성</a:t>
+              <a:t>•  23.3  AWR Compare Periods 보고서 생성</a:t>
             </a:r>
           </a:p>
           <a:p>
@@ -10895,7 +10895,7 @@
                 </a:solidFill>
                 <a:latin typeface="맑은 고딕"/>
               </a:rPr>
-              <a:t>•  11.4  보고서 구조 읽기 — 어디를 먼저 보는가</a:t>
+              <a:t>•  23.4  보고서 구조 읽기 — 어디를 먼저 보는가</a:t>
             </a:r>
           </a:p>
           <a:p>
@@ -10911,7 +10911,7 @@
                 </a:solidFill>
                 <a:latin typeface="맑은 고딕"/>
               </a:rPr>
-              <a:t>•  11.5  Load Profile 두 구간 대조</a:t>
+              <a:t>•  23.5  Load Profile 두 구간 대조</a:t>
             </a:r>
           </a:p>
           <a:p>
@@ -10927,7 +10927,7 @@
                 </a:solidFill>
                 <a:latin typeface="맑은 고딕"/>
               </a:rPr>
-              <a:t>•  11.6  핵심 판정 — 부하 증가인가 성능 저하인가</a:t>
+              <a:t>•  23.6  핵심 판정 — 부하 증가인가 성능 저하인가</a:t>
             </a:r>
           </a:p>
           <a:p>
@@ -10943,7 +10943,7 @@
                 </a:solidFill>
                 <a:latin typeface="맑은 고딕"/>
               </a:rPr>
-              <a:t>•  11.7  SQL 단위 회귀 탐지 — 실행계획이 바뀌어 느려진 SQL</a:t>
+              <a:t>•  23.7  SQL 단위 회귀 탐지 — 실행계획이 바뀌어 느려진 SQL</a:t>
             </a:r>
           </a:p>
           <a:p>
@@ -10959,7 +10959,7 @@
                 </a:solidFill>
                 <a:latin typeface="맑은 고딕"/>
               </a:rPr>
-              <a:t>•  11.8  베이스라인 대비 비교 — 평시를 저장해 둔다</a:t>
+              <a:t>•  23.8  베이스라인 대비 비교 — 평시를 저장해 둔다</a:t>
             </a:r>
           </a:p>
           <a:p>
@@ -10975,7 +10975,7 @@
                 </a:solidFill>
                 <a:latin typeface="맑은 고딕"/>
               </a:rPr>
-              <a:t>•  11.9  라이선스와 대안 — Statspack 두 구간 수동 비교</a:t>
+              <a:t>•  23.9  라이선스와 대안 — Statspack 두 구간 수동 비교</a:t>
             </a:r>
           </a:p>
         </p:txBody>
@@ -11304,7 +11304,7 @@
                 </a:solidFill>
                 <a:latin typeface="맑은 고딕"/>
               </a:rPr>
-              <a:t>11.9</a:t>
+              <a:t>23.9</a:t>
             </a:r>
           </a:p>
         </p:txBody>
@@ -12856,7 +12856,7 @@
                 </a:solidFill>
                 <a:latin typeface="맑은 고딕"/>
               </a:rPr>
-              <a:t>11.2</a:t>
+              <a:t>23.2</a:t>
             </a:r>
           </a:p>
         </p:txBody>
@@ -13764,7 +13764,7 @@
                 </a:solidFill>
                 <a:latin typeface="맑은 고딕"/>
               </a:rPr>
-              <a:t>11.3</a:t>
+              <a:t>23.3</a:t>
             </a:r>
           </a:p>
         </p:txBody>
